--- a/resources/ijp-operetta-importer-annotations.pptx
+++ b/resources/ijp-operetta-importer-annotations.pptx
@@ -261,7 +261,7 @@
           <a:p>
             <a:fld id="{C62AF467-F9ED-4C4D-A055-74DCFDDE6DCD}" type="datetimeFigureOut">
               <a:rPr lang="en-US" smtClean="0"/>
-              <a:t>5/5/2025</a:t>
+              <a:t>5/28/2026</a:t>
             </a:fld>
             <a:endParaRPr lang="en-US"/>
           </a:p>
@@ -459,7 +459,7 @@
           <a:p>
             <a:fld id="{C62AF467-F9ED-4C4D-A055-74DCFDDE6DCD}" type="datetimeFigureOut">
               <a:rPr lang="en-US" smtClean="0"/>
-              <a:t>5/5/2025</a:t>
+              <a:t>5/28/2026</a:t>
             </a:fld>
             <a:endParaRPr lang="en-US"/>
           </a:p>
@@ -667,7 +667,7 @@
           <a:p>
             <a:fld id="{C62AF467-F9ED-4C4D-A055-74DCFDDE6DCD}" type="datetimeFigureOut">
               <a:rPr lang="en-US" smtClean="0"/>
-              <a:t>5/5/2025</a:t>
+              <a:t>5/28/2026</a:t>
             </a:fld>
             <a:endParaRPr lang="en-US"/>
           </a:p>
@@ -865,7 +865,7 @@
           <a:p>
             <a:fld id="{C62AF467-F9ED-4C4D-A055-74DCFDDE6DCD}" type="datetimeFigureOut">
               <a:rPr lang="en-US" smtClean="0"/>
-              <a:t>5/5/2025</a:t>
+              <a:t>5/28/2026</a:t>
             </a:fld>
             <a:endParaRPr lang="en-US"/>
           </a:p>
@@ -1140,7 +1140,7 @@
           <a:p>
             <a:fld id="{C62AF467-F9ED-4C4D-A055-74DCFDDE6DCD}" type="datetimeFigureOut">
               <a:rPr lang="en-US" smtClean="0"/>
-              <a:t>5/5/2025</a:t>
+              <a:t>5/28/2026</a:t>
             </a:fld>
             <a:endParaRPr lang="en-US"/>
           </a:p>
@@ -1405,7 +1405,7 @@
           <a:p>
             <a:fld id="{C62AF467-F9ED-4C4D-A055-74DCFDDE6DCD}" type="datetimeFigureOut">
               <a:rPr lang="en-US" smtClean="0"/>
-              <a:t>5/5/2025</a:t>
+              <a:t>5/28/2026</a:t>
             </a:fld>
             <a:endParaRPr lang="en-US"/>
           </a:p>
@@ -1817,7 +1817,7 @@
           <a:p>
             <a:fld id="{C62AF467-F9ED-4C4D-A055-74DCFDDE6DCD}" type="datetimeFigureOut">
               <a:rPr lang="en-US" smtClean="0"/>
-              <a:t>5/5/2025</a:t>
+              <a:t>5/28/2026</a:t>
             </a:fld>
             <a:endParaRPr lang="en-US"/>
           </a:p>
@@ -1958,7 +1958,7 @@
           <a:p>
             <a:fld id="{C62AF467-F9ED-4C4D-A055-74DCFDDE6DCD}" type="datetimeFigureOut">
               <a:rPr lang="en-US" smtClean="0"/>
-              <a:t>5/5/2025</a:t>
+              <a:t>5/28/2026</a:t>
             </a:fld>
             <a:endParaRPr lang="en-US"/>
           </a:p>
@@ -2071,7 +2071,7 @@
           <a:p>
             <a:fld id="{C62AF467-F9ED-4C4D-A055-74DCFDDE6DCD}" type="datetimeFigureOut">
               <a:rPr lang="en-US" smtClean="0"/>
-              <a:t>5/5/2025</a:t>
+              <a:t>5/28/2026</a:t>
             </a:fld>
             <a:endParaRPr lang="en-US"/>
           </a:p>
@@ -2382,7 +2382,7 @@
           <a:p>
             <a:fld id="{C62AF467-F9ED-4C4D-A055-74DCFDDE6DCD}" type="datetimeFigureOut">
               <a:rPr lang="en-US" smtClean="0"/>
-              <a:t>5/5/2025</a:t>
+              <a:t>5/28/2026</a:t>
             </a:fld>
             <a:endParaRPr lang="en-US"/>
           </a:p>
@@ -2670,7 +2670,7 @@
           <a:p>
             <a:fld id="{C62AF467-F9ED-4C4D-A055-74DCFDDE6DCD}" type="datetimeFigureOut">
               <a:rPr lang="en-US" smtClean="0"/>
-              <a:t>5/5/2025</a:t>
+              <a:t>5/28/2026</a:t>
             </a:fld>
             <a:endParaRPr lang="en-US"/>
           </a:p>
@@ -2911,7 +2911,7 @@
           <a:p>
             <a:fld id="{C62AF467-F9ED-4C4D-A055-74DCFDDE6DCD}" type="datetimeFigureOut">
               <a:rPr lang="en-US" smtClean="0"/>
-              <a:t>5/5/2025</a:t>
+              <a:t>5/28/2026</a:t>
             </a:fld>
             <a:endParaRPr lang="en-US"/>
           </a:p>
@@ -3330,6 +3330,36 @@
       </p:grpSpPr>
       <p:pic>
         <p:nvPicPr>
+          <p:cNvPr id="3" name="Picture 2">
+            <a:extLst>
+              <a:ext uri="{FF2B5EF4-FFF2-40B4-BE49-F238E27FC236}">
+                <a16:creationId xmlns:a16="http://schemas.microsoft.com/office/drawing/2014/main" id="{A9630698-DF2F-CCD3-3C47-80731344A5A4}"/>
+              </a:ext>
+            </a:extLst>
+          </p:cNvPr>
+          <p:cNvPicPr>
+            <a:picLocks noChangeAspect="1"/>
+          </p:cNvPicPr>
+          <p:nvPr/>
+        </p:nvPicPr>
+        <p:blipFill>
+          <a:blip r:embed="rId2"/>
+          <a:stretch>
+            <a:fillRect/>
+          </a:stretch>
+        </p:blipFill>
+        <p:spPr>
+          <a:xfrm>
+            <a:off x="3384004" y="3575402"/>
+            <a:ext cx="5645376" cy="3096531"/>
+          </a:xfrm>
+          <a:prstGeom prst="rect">
+            <a:avLst/>
+          </a:prstGeom>
+        </p:spPr>
+      </p:pic>
+      <p:pic>
+        <p:nvPicPr>
           <p:cNvPr id="20" name="Picture 19">
             <a:extLst>
               <a:ext uri="{FF2B5EF4-FFF2-40B4-BE49-F238E27FC236}">
@@ -3343,7 +3373,7 @@
           <p:nvPr/>
         </p:nvPicPr>
         <p:blipFill rotWithShape="1">
-          <a:blip r:embed="rId2"/>
+          <a:blip r:embed="rId3"/>
           <a:srcRect r="-110" b="56801"/>
           <a:stretch/>
         </p:blipFill>
@@ -3915,35 +3945,6 @@
           </a:p>
         </p:txBody>
       </p:sp>
-      <p:pic>
-        <p:nvPicPr>
-          <p:cNvPr id="23" name="Picture 22">
-            <a:extLst>
-              <a:ext uri="{FF2B5EF4-FFF2-40B4-BE49-F238E27FC236}">
-                <a16:creationId xmlns:a16="http://schemas.microsoft.com/office/drawing/2014/main" id="{F4BE2E70-738B-46F0-B06B-D33F92B707E3}"/>
-              </a:ext>
-            </a:extLst>
-          </p:cNvPr>
-          <p:cNvPicPr>
-            <a:picLocks noChangeAspect="1"/>
-          </p:cNvPicPr>
-          <p:nvPr/>
-        </p:nvPicPr>
-        <p:blipFill rotWithShape="1">
-          <a:blip r:embed="rId2"/>
-          <a:srcRect l="-110" t="43326" b="18667"/>
-          <a:stretch/>
-        </p:blipFill>
-        <p:spPr>
-          <a:xfrm>
-            <a:off x="3384004" y="3855280"/>
-            <a:ext cx="5663062" cy="2606480"/>
-          </a:xfrm>
-          <a:prstGeom prst="rect">
-            <a:avLst/>
-          </a:prstGeom>
-        </p:spPr>
-      </p:pic>
       <p:sp>
         <p:nvSpPr>
           <p:cNvPr id="35" name="Rectangle 34">
@@ -3958,7 +3959,7 @@
         </p:nvSpPr>
         <p:spPr>
           <a:xfrm>
-            <a:off x="2922625" y="4149733"/>
+            <a:off x="2908511" y="3932493"/>
             <a:ext cx="1570635" cy="123568"/>
           </a:xfrm>
           <a:prstGeom prst="rect">
@@ -4016,7 +4017,7 @@
         </p:nvSpPr>
         <p:spPr>
           <a:xfrm>
-            <a:off x="2927529" y="5061884"/>
+            <a:off x="2841452" y="5200171"/>
             <a:ext cx="2019112" cy="123568"/>
           </a:xfrm>
           <a:prstGeom prst="rect">
@@ -4074,7 +4075,7 @@
         </p:nvSpPr>
         <p:spPr>
           <a:xfrm>
-            <a:off x="2922622" y="4746705"/>
+            <a:off x="2876039" y="4575206"/>
             <a:ext cx="2024019" cy="123568"/>
           </a:xfrm>
           <a:prstGeom prst="rect">
@@ -4132,7 +4133,7 @@
         </p:nvSpPr>
         <p:spPr>
           <a:xfrm>
-            <a:off x="2922622" y="4464912"/>
+            <a:off x="2908508" y="4240099"/>
             <a:ext cx="788318" cy="123568"/>
           </a:xfrm>
           <a:prstGeom prst="rect">
@@ -4190,7 +4191,7 @@
         </p:nvSpPr>
         <p:spPr>
           <a:xfrm>
-            <a:off x="2939687" y="5360562"/>
+            <a:off x="2853610" y="5498849"/>
             <a:ext cx="1639933" cy="123568"/>
           </a:xfrm>
           <a:prstGeom prst="rect">
@@ -4248,7 +4249,7 @@
         </p:nvSpPr>
         <p:spPr>
           <a:xfrm>
-            <a:off x="2922622" y="6110484"/>
+            <a:off x="2836545" y="6263818"/>
             <a:ext cx="1949813" cy="123568"/>
           </a:xfrm>
           <a:prstGeom prst="rect">
@@ -4306,7 +4307,7 @@
         </p:nvSpPr>
         <p:spPr>
           <a:xfrm>
-            <a:off x="2470596" y="4002239"/>
+            <a:off x="2423110" y="3790791"/>
             <a:ext cx="247650" cy="369332"/>
           </a:xfrm>
           <a:prstGeom prst="rect">
@@ -4341,7 +4342,7 @@
         </p:nvSpPr>
         <p:spPr>
           <a:xfrm>
-            <a:off x="2470596" y="4339270"/>
+            <a:off x="2423110" y="4120249"/>
             <a:ext cx="247650" cy="369332"/>
           </a:xfrm>
           <a:prstGeom prst="rect">
@@ -4376,7 +4377,7 @@
         </p:nvSpPr>
         <p:spPr>
           <a:xfrm>
-            <a:off x="2470596" y="4685607"/>
+            <a:off x="2411055" y="4438748"/>
             <a:ext cx="247650" cy="369332"/>
           </a:xfrm>
           <a:prstGeom prst="rect">
@@ -4411,7 +4412,7 @@
         </p:nvSpPr>
         <p:spPr>
           <a:xfrm>
-            <a:off x="2355072" y="4978791"/>
+            <a:off x="2268995" y="5117078"/>
             <a:ext cx="426068" cy="369332"/>
           </a:xfrm>
           <a:prstGeom prst="rect">
@@ -4446,7 +4447,7 @@
         </p:nvSpPr>
         <p:spPr>
           <a:xfrm>
-            <a:off x="2355072" y="5325128"/>
+            <a:off x="2268995" y="5463415"/>
             <a:ext cx="426068" cy="369332"/>
           </a:xfrm>
           <a:prstGeom prst="rect">
@@ -4481,7 +4482,7 @@
         </p:nvSpPr>
         <p:spPr>
           <a:xfrm>
-            <a:off x="2355072" y="5987602"/>
+            <a:off x="2268995" y="6140936"/>
             <a:ext cx="426068" cy="369332"/>
           </a:xfrm>
           <a:prstGeom prst="rect">
@@ -4498,6 +4499,99 @@
             <a:r>
               <a:rPr lang="en-US" dirty="0"/>
               <a:t>12</a:t>
+            </a:r>
+          </a:p>
+        </p:txBody>
+      </p:sp>
+      <p:sp>
+        <p:nvSpPr>
+          <p:cNvPr id="4" name="Rectangle 3">
+            <a:extLst>
+              <a:ext uri="{FF2B5EF4-FFF2-40B4-BE49-F238E27FC236}">
+                <a16:creationId xmlns:a16="http://schemas.microsoft.com/office/drawing/2014/main" id="{D6AE3C3F-5FCB-1B86-B9CF-53B3ABB7DEAA}"/>
+              </a:ext>
+            </a:extLst>
+          </p:cNvPr>
+          <p:cNvSpPr/>
+          <p:nvPr/>
+        </p:nvSpPr>
+        <p:spPr>
+          <a:xfrm>
+            <a:off x="2873648" y="4846182"/>
+            <a:ext cx="5192050" cy="158885"/>
+          </a:xfrm>
+          <a:prstGeom prst="rect">
+            <a:avLst/>
+          </a:prstGeom>
+          <a:solidFill>
+            <a:srgbClr val="FFC000">
+              <a:alpha val="36863"/>
+            </a:srgbClr>
+          </a:solidFill>
+          <a:ln>
+            <a:noFill/>
+          </a:ln>
+        </p:spPr>
+        <p:style>
+          <a:lnRef idx="2">
+            <a:schemeClr val="accent1">
+              <a:shade val="50000"/>
+            </a:schemeClr>
+          </a:lnRef>
+          <a:fillRef idx="1">
+            <a:schemeClr val="accent1"/>
+          </a:fillRef>
+          <a:effectRef idx="0">
+            <a:schemeClr val="accent1"/>
+          </a:effectRef>
+          <a:fontRef idx="minor">
+            <a:schemeClr val="lt1"/>
+          </a:fontRef>
+        </p:style>
+        <p:txBody>
+          <a:bodyPr rtlCol="0" anchor="ctr"/>
+          <a:lstStyle/>
+          <a:p>
+            <a:pPr algn="ctr"/>
+            <a:endParaRPr lang="en-US">
+              <a:solidFill>
+                <a:srgbClr val="FFC000"/>
+              </a:solidFill>
+            </a:endParaRPr>
+          </a:p>
+        </p:txBody>
+      </p:sp>
+      <p:sp>
+        <p:nvSpPr>
+          <p:cNvPr id="5" name="TextBox 4">
+            <a:extLst>
+              <a:ext uri="{FF2B5EF4-FFF2-40B4-BE49-F238E27FC236}">
+                <a16:creationId xmlns:a16="http://schemas.microsoft.com/office/drawing/2014/main" id="{3D45AA11-D79C-F9E9-0A2E-883ABEB716C8}"/>
+              </a:ext>
+            </a:extLst>
+          </p:cNvPr>
+          <p:cNvSpPr txBox="1"/>
+          <p:nvPr/>
+        </p:nvSpPr>
+        <p:spPr>
+          <a:xfrm>
+            <a:off x="2404064" y="4736249"/>
+            <a:ext cx="414923" cy="369332"/>
+          </a:xfrm>
+          <a:prstGeom prst="rect">
+            <a:avLst/>
+          </a:prstGeom>
+          <a:noFill/>
+        </p:spPr>
+        <p:txBody>
+          <a:bodyPr wrap="square" rtlCol="0">
+            <a:spAutoFit/>
+          </a:bodyPr>
+          <a:lstStyle/>
+          <a:p>
+            <a:r>
+              <a:rPr lang="en-US" dirty="0"/>
+              <a:t>9a</a:t>
             </a:r>
           </a:p>
         </p:txBody>
